--- a/teacher/plan/rag-search-실습가이드.pptx
+++ b/teacher/plan/rag-search-실습가이드.pptx
@@ -603,6 +603,9 @@
 사전 준비가 끝났는지는 Q01 실행 한 번으로 확인함. 시작 검사가 빠진 것과 할 일을 출력함
 키는 dotenv_values()로 읽어 클라이언트에 인자로만 넘김. 환경변수에 올리지 않고 화면에 찍지 않음
 Cohere 체험 키는 리랭크가 분당 10회이고 복합 질문 한 번에 리랭크가 최대 6번이라 수업 중에는 조별 1대로 실행함
+가상환경 활성화는 터미널 창마다 한 번 함. Git Bash는 source .venv/Scripts/activate, macOS와 Linux는 source .venv/bin/activate
+PowerShell의 Bypass는 지금 창에서만 허용함. 계속 허용하려면 Set-ExecutionPolicy -Scope CurrentUser -ExecutionPolicy RemoteSigned
+같은 질문도 LLM 값은 실행마다 조금 다를 수 있음. 강사와는 대상 청크 수, 판정, 종료 상태로 비교함
 상세 문서: https://github.com/unicorn-campus/hybrid-ai/blob/main/hands-on/solutions/rag/retriever/README.md</a:t>
             </a:r>
             <a:endParaRPr lang="en-US" dirty="0"/>
@@ -4354,7 +4357,7 @@
                 <a:ea typeface="Pretendard" pitchFamily="34" charset="-122"/>
                 <a:cs typeface="Pretendard" pitchFamily="34" charset="-120"/>
               </a:rPr>
-              <a:t>공용 가상환경 rag/.venv 준비(README 3장)</a:t>
+              <a:t>rag 폴더에서 가상환경 활성화: .venv\Scripts\Activate.ps1(README 3장)</a:t>
             </a:r>
             <a:endParaRPr lang="en-US" sz="1600" dirty="0"/>
           </a:p>
@@ -4524,7 +4527,7 @@
                 <a:ea typeface="Pretendard" pitchFamily="34" charset="-122"/>
                 <a:cs typeface="Pretendard" pitchFamily="34" charset="-120"/>
               </a:rPr>
-              <a:t>수업용 명령 2개(retriever 폴더에서)</a:t>
+              <a:t>수업용 명령 2개(활성화 뒤 retriever 폴더에서)</a:t>
             </a:r>
             <a:endParaRPr lang="en-US" sz="1800" dirty="0"/>
           </a:p>
@@ -4574,7 +4577,7 @@
                 <a:ea typeface="Pretendard" pitchFamily="34" charset="-122"/>
                 <a:cs typeface="Pretendard" pitchFamily="34" charset="-120"/>
               </a:rPr>
-              <a:t>../.venv/Scripts/python.exe search_docs.py --qid Q01</a:t>
+              <a:t>python search_docs.py --qid Q01</a:t>
             </a:r>
             <a:endParaRPr lang="en-US" sz="1500" dirty="0"/>
           </a:p>
@@ -4614,7 +4617,7 @@
                 <a:ea typeface="Pretendard" pitchFamily="34" charset="-122"/>
                 <a:cs typeface="Pretendard" pitchFamily="34" charset="-120"/>
               </a:rPr>
-              <a:t>../.venv/Scripts/python.exe search_docs.py --qid Q18</a:t>
+              <a:t>python search_docs.py --qid Q18</a:t>
             </a:r>
             <a:endParaRPr lang="en-US" sz="1500" dirty="0"/>
           </a:p>
@@ -4634,7 +4637,7 @@
                 <a:ea typeface="Pretendard" pitchFamily="34" charset="-122"/>
                 <a:cs typeface="Pretendard" pitchFamily="34" charset="-120"/>
               </a:rPr>
-              <a:t>답 없는 질문이 지어내지 않고 되묻기 또는 「확인 필요」로 끝남(macOS는 ../.venv/bin/python)</a:t>
+              <a:t>답 없는 질문이 지어내지 않고 되묻기 또는 「확인 필요」로 끝남. 프롬프트에 (.venv)가 없으면 먼저 활성화</a:t>
             </a:r>
             <a:endParaRPr lang="en-US" sz="1500" dirty="0"/>
           </a:p>
@@ -5754,7 +5757,7 @@
                 <a:ea typeface="Pretendard" pitchFamily="34" charset="-122"/>
                 <a:cs typeface="Pretendard" pitchFamily="34" charset="-120"/>
               </a:rPr>
-              <a:t>같은 질문도 LLM 값은 실행마다 조금 다를 수 있음. 강사와는 대상 청크 수, 판정, 종료 상태로 비교함</a:t>
+              <a:t>PowerShell에서 활성화가 막히면 먼저 Set-ExecutionPolicy -Scope Process -ExecutionPolicy Bypass</a:t>
             </a:r>
             <a:endParaRPr lang="en-US" sz="1600" dirty="0"/>
           </a:p>

--- a/teacher/plan/rag-search-실습가이드.pptx
+++ b/teacher/plan/rag-search-실습가이드.pptx
@@ -5030,7 +5030,7 @@
                           <a:ea typeface="Pretendard" pitchFamily="34" charset="-122"/>
                           <a:cs typeface="Pretendard" pitchFamily="34" charset="-120"/>
                         </a:rPr>
-                        <a:t>agent, 212개(전체 260개 중)</a:t>
+                        <a:t>auditor(기본), 260개(전체 260개 중)</a:t>
                       </a:r>
                       <a:endParaRPr lang="en-US" sz="1400" dirty="0">
                         <a:latin typeface="Pretendard" charset="0"/>
